--- a/VITALE_PPT.pptx
+++ b/VITALE_PPT.pptx
@@ -13,7 +13,8 @@
     <p:sldId id="261" r:id="rId7"/>
     <p:sldId id="264" r:id="rId8"/>
     <p:sldId id="262" r:id="rId9"/>
-    <p:sldId id="263" r:id="rId10"/>
+    <p:sldId id="265" r:id="rId10"/>
+    <p:sldId id="263" r:id="rId11"/>
   </p:sldIdLst>
   <p:sldSz cx="12192000" cy="6858000"/>
   <p:notesSz cx="6858000" cy="9144000"/>
@@ -465,7 +466,7 @@
           <a:p>
             <a:fld id="{3F52AFC1-4F45-459D-BC95-0F8F5E3A4294}" type="datetimeFigureOut">
               <a:rPr lang="en-US" smtClean="0"/>
-              <a:t>10/13/2025</a:t>
+              <a:t>10/20/2025</a:t>
             </a:fld>
             <a:endParaRPr lang="en-US"/>
           </a:p>
@@ -663,7 +664,7 @@
           <a:p>
             <a:fld id="{3F52AFC1-4F45-459D-BC95-0F8F5E3A4294}" type="datetimeFigureOut">
               <a:rPr lang="en-US" smtClean="0"/>
-              <a:t>10/13/2025</a:t>
+              <a:t>10/20/2025</a:t>
             </a:fld>
             <a:endParaRPr lang="en-US"/>
           </a:p>
@@ -871,7 +872,7 @@
           <a:p>
             <a:fld id="{3F52AFC1-4F45-459D-BC95-0F8F5E3A4294}" type="datetimeFigureOut">
               <a:rPr lang="en-US" smtClean="0"/>
-              <a:t>10/13/2025</a:t>
+              <a:t>10/20/2025</a:t>
             </a:fld>
             <a:endParaRPr lang="en-US"/>
           </a:p>
@@ -1069,7 +1070,7 @@
           <a:p>
             <a:fld id="{3F52AFC1-4F45-459D-BC95-0F8F5E3A4294}" type="datetimeFigureOut">
               <a:rPr lang="en-US" smtClean="0"/>
-              <a:t>10/13/2025</a:t>
+              <a:t>10/20/2025</a:t>
             </a:fld>
             <a:endParaRPr lang="en-US"/>
           </a:p>
@@ -1344,7 +1345,7 @@
           <a:p>
             <a:fld id="{3F52AFC1-4F45-459D-BC95-0F8F5E3A4294}" type="datetimeFigureOut">
               <a:rPr lang="en-US" smtClean="0"/>
-              <a:t>10/13/2025</a:t>
+              <a:t>10/20/2025</a:t>
             </a:fld>
             <a:endParaRPr lang="en-US"/>
           </a:p>
@@ -1609,7 +1610,7 @@
           <a:p>
             <a:fld id="{3F52AFC1-4F45-459D-BC95-0F8F5E3A4294}" type="datetimeFigureOut">
               <a:rPr lang="en-US" smtClean="0"/>
-              <a:t>10/13/2025</a:t>
+              <a:t>10/20/2025</a:t>
             </a:fld>
             <a:endParaRPr lang="en-US"/>
           </a:p>
@@ -2021,7 +2022,7 @@
           <a:p>
             <a:fld id="{3F52AFC1-4F45-459D-BC95-0F8F5E3A4294}" type="datetimeFigureOut">
               <a:rPr lang="en-US" smtClean="0"/>
-              <a:t>10/13/2025</a:t>
+              <a:t>10/20/2025</a:t>
             </a:fld>
             <a:endParaRPr lang="en-US"/>
           </a:p>
@@ -2162,7 +2163,7 @@
           <a:p>
             <a:fld id="{3F52AFC1-4F45-459D-BC95-0F8F5E3A4294}" type="datetimeFigureOut">
               <a:rPr lang="en-US" smtClean="0"/>
-              <a:t>10/13/2025</a:t>
+              <a:t>10/20/2025</a:t>
             </a:fld>
             <a:endParaRPr lang="en-US"/>
           </a:p>
@@ -2275,7 +2276,7 @@
           <a:p>
             <a:fld id="{3F52AFC1-4F45-459D-BC95-0F8F5E3A4294}" type="datetimeFigureOut">
               <a:rPr lang="en-US" smtClean="0"/>
-              <a:t>10/13/2025</a:t>
+              <a:t>10/20/2025</a:t>
             </a:fld>
             <a:endParaRPr lang="en-US"/>
           </a:p>
@@ -2586,7 +2587,7 @@
           <a:p>
             <a:fld id="{3F52AFC1-4F45-459D-BC95-0F8F5E3A4294}" type="datetimeFigureOut">
               <a:rPr lang="en-US" smtClean="0"/>
-              <a:t>10/13/2025</a:t>
+              <a:t>10/20/2025</a:t>
             </a:fld>
             <a:endParaRPr lang="en-US"/>
           </a:p>
@@ -2874,7 +2875,7 @@
           <a:p>
             <a:fld id="{3F52AFC1-4F45-459D-BC95-0F8F5E3A4294}" type="datetimeFigureOut">
               <a:rPr lang="en-US" smtClean="0"/>
-              <a:t>10/13/2025</a:t>
+              <a:t>10/20/2025</a:t>
             </a:fld>
             <a:endParaRPr lang="en-US"/>
           </a:p>
@@ -3115,7 +3116,7 @@
           <a:p>
             <a:fld id="{3F52AFC1-4F45-459D-BC95-0F8F5E3A4294}" type="datetimeFigureOut">
               <a:rPr lang="en-US" smtClean="0"/>
-              <a:t>10/13/2025</a:t>
+              <a:t>10/20/2025</a:t>
             </a:fld>
             <a:endParaRPr lang="en-US"/>
           </a:p>
@@ -3570,8 +3571,16 @@
               <a:rPr lang="en-US" sz="4800" dirty="0"/>
             </a:br>
             <a:r>
-              <a:rPr lang="en-US" sz="4800" dirty="0"/>
-              <a:t>https://github.com/vince760/ANA500</a:t>
+              <a:rPr lang="en-US" sz="4800" dirty="0" err="1">
+                <a:hlinkClick r:id="rId2"/>
+              </a:rPr>
+              <a:t>Github</a:t>
+            </a:r>
+            <a:r>
+              <a:rPr lang="en-US" sz="4800" dirty="0">
+                <a:hlinkClick r:id="rId2"/>
+              </a:rPr>
+              <a:t> Project</a:t>
             </a:r>
             <a:endParaRPr lang="en-US" dirty="0"/>
           </a:p>
@@ -3618,6 +3627,100 @@
     <p:extLst>
       <p:ext uri="{BB962C8B-B14F-4D97-AF65-F5344CB8AC3E}">
         <p14:creationId xmlns:p14="http://schemas.microsoft.com/office/powerpoint/2010/main" val="3651251486"/>
+      </p:ext>
+    </p:extLst>
+  </p:cSld>
+  <p:clrMapOvr>
+    <a:masterClrMapping/>
+  </p:clrMapOvr>
+</p:sld>
+</file>
+
+<file path=ppt/slides/slide10.xml><?xml version="1.0" encoding="utf-8"?>
+<p:sld xmlns:a="http://schemas.openxmlformats.org/drawingml/2006/main" xmlns:r="http://schemas.openxmlformats.org/officeDocument/2006/relationships" xmlns:p="http://schemas.openxmlformats.org/presentationml/2006/main">
+  <p:cSld>
+    <p:spTree>
+      <p:nvGrpSpPr>
+        <p:cNvPr id="1" name=""/>
+        <p:cNvGrpSpPr/>
+        <p:nvPr/>
+      </p:nvGrpSpPr>
+      <p:grpSpPr>
+        <a:xfrm>
+          <a:off x="0" y="0"/>
+          <a:ext cx="0" cy="0"/>
+          <a:chOff x="0" y="0"/>
+          <a:chExt cx="0" cy="0"/>
+        </a:xfrm>
+      </p:grpSpPr>
+      <p:sp>
+        <p:nvSpPr>
+          <p:cNvPr id="2" name="Title 1">
+            <a:extLst>
+              <a:ext uri="{FF2B5EF4-FFF2-40B4-BE49-F238E27FC236}">
+                <a16:creationId xmlns:a16="http://schemas.microsoft.com/office/drawing/2014/main" id="{7998C1A2-E365-4EAD-A777-10EF9BD2588C}"/>
+              </a:ext>
+            </a:extLst>
+          </p:cNvPr>
+          <p:cNvSpPr>
+            <a:spLocks noGrp="1"/>
+          </p:cNvSpPr>
+          <p:nvPr>
+            <p:ph type="title"/>
+          </p:nvPr>
+        </p:nvSpPr>
+        <p:spPr/>
+        <p:txBody>
+          <a:bodyPr/>
+          <a:lstStyle/>
+          <a:p>
+            <a:r>
+              <a:rPr lang="en-US" dirty="0"/>
+              <a:t>Act</a:t>
+            </a:r>
+          </a:p>
+        </p:txBody>
+      </p:sp>
+      <p:sp>
+        <p:nvSpPr>
+          <p:cNvPr id="3" name="Content Placeholder 2">
+            <a:extLst>
+              <a:ext uri="{FF2B5EF4-FFF2-40B4-BE49-F238E27FC236}">
+                <a16:creationId xmlns:a16="http://schemas.microsoft.com/office/drawing/2014/main" id="{83DC0D0A-FDCC-4561-A8EB-1F836A94AACC}"/>
+              </a:ext>
+            </a:extLst>
+          </p:cNvPr>
+          <p:cNvSpPr>
+            <a:spLocks noGrp="1"/>
+          </p:cNvSpPr>
+          <p:nvPr>
+            <p:ph idx="1"/>
+          </p:nvPr>
+        </p:nvSpPr>
+        <p:spPr/>
+        <p:txBody>
+          <a:bodyPr/>
+          <a:lstStyle/>
+          <a:p>
+            <a:r>
+              <a:rPr lang="en-US" sz="1800" dirty="0">
+                <a:solidFill>
+                  <a:srgbClr val="000000"/>
+                </a:solidFill>
+                <a:effectLst/>
+                <a:latin typeface="Times New Roman" panose="02020603050405020304" pitchFamily="18" charset="0"/>
+                <a:ea typeface="Times New Roman" panose="02020603050405020304" pitchFamily="18" charset="0"/>
+              </a:rPr>
+              <a:t>&lt;apply results, connect results with the chosen problem statement or business question&gt;</a:t>
+            </a:r>
+            <a:endParaRPr lang="en-US" dirty="0"/>
+          </a:p>
+        </p:txBody>
+      </p:sp>
+    </p:spTree>
+    <p:extLst>
+      <p:ext uri="{BB962C8B-B14F-4D97-AF65-F5344CB8AC3E}">
+        <p14:creationId xmlns:p14="http://schemas.microsoft.com/office/powerpoint/2010/main" val="4024108741"/>
       </p:ext>
     </p:extLst>
   </p:cSld>
@@ -4071,8 +4174,26 @@
                 <a:latin typeface="Times New Roman" panose="02020603050405020304" pitchFamily="18" charset="0"/>
                 <a:ea typeface="Times New Roman" panose="02020603050405020304" pitchFamily="18" charset="0"/>
               </a:rPr>
-              <a:t>Kaggle – Airline Passenger Satisfaction</a:t>
-            </a:r>
+              <a:t>Kaggle – </a:t>
+            </a:r>
+            <a:r>
+              <a:rPr lang="en-US" sz="1400" dirty="0">
+                <a:solidFill>
+                  <a:srgbClr val="000000"/>
+                </a:solidFill>
+                <a:latin typeface="Times New Roman" panose="02020603050405020304" pitchFamily="18" charset="0"/>
+                <a:ea typeface="Times New Roman" panose="02020603050405020304" pitchFamily="18" charset="0"/>
+                <a:hlinkClick r:id="rId2"/>
+              </a:rPr>
+              <a:t>Airline Passenger Satisfaction</a:t>
+            </a:r>
+            <a:endParaRPr lang="en-US" sz="1400" dirty="0">
+              <a:solidFill>
+                <a:srgbClr val="000000"/>
+              </a:solidFill>
+              <a:latin typeface="Times New Roman" panose="02020603050405020304" pitchFamily="18" charset="0"/>
+              <a:ea typeface="Times New Roman" panose="02020603050405020304" pitchFamily="18" charset="0"/>
+            </a:endParaRPr>
           </a:p>
           <a:p>
             <a:r>
@@ -4587,8 +4708,8 @@
         </p:blipFill>
         <p:spPr>
           <a:xfrm>
-            <a:off x="5106666" y="2921103"/>
-            <a:ext cx="3180750" cy="2695912"/>
+            <a:off x="5250660" y="2071951"/>
+            <a:ext cx="2819634" cy="2389840"/>
           </a:xfrm>
           <a:prstGeom prst="rect">
             <a:avLst/>
@@ -4617,7 +4738,7 @@
         </p:blipFill>
         <p:spPr>
           <a:xfrm>
-            <a:off x="8560232" y="3877168"/>
+            <a:off x="8487104" y="2071951"/>
             <a:ext cx="3182683" cy="2533983"/>
           </a:xfrm>
           <a:prstGeom prst="rect">
@@ -4625,6 +4746,132 @@
           </a:prstGeom>
         </p:spPr>
       </p:pic>
+      <p:sp>
+        <p:nvSpPr>
+          <p:cNvPr id="4" name="TextBox 3">
+            <a:extLst>
+              <a:ext uri="{FF2B5EF4-FFF2-40B4-BE49-F238E27FC236}">
+                <a16:creationId xmlns:a16="http://schemas.microsoft.com/office/drawing/2014/main" id="{F2CA8614-834F-621C-24B3-467BC89707C6}"/>
+              </a:ext>
+            </a:extLst>
+          </p:cNvPr>
+          <p:cNvSpPr txBox="1"/>
+          <p:nvPr/>
+        </p:nvSpPr>
+        <p:spPr>
+          <a:xfrm>
+            <a:off x="659007" y="4327156"/>
+            <a:ext cx="4174843" cy="1138773"/>
+          </a:xfrm>
+          <a:prstGeom prst="rect">
+            <a:avLst/>
+          </a:prstGeom>
+          <a:noFill/>
+        </p:spPr>
+        <p:txBody>
+          <a:bodyPr wrap="square" rtlCol="0">
+            <a:spAutoFit/>
+          </a:bodyPr>
+          <a:lstStyle/>
+          <a:p>
+            <a:r>
+              <a:rPr lang="en-US" dirty="0"/>
+              <a:t>Delays vs Distance:</a:t>
+            </a:r>
+          </a:p>
+          <a:p>
+            <a:r>
+              <a:rPr lang="en-US" sz="1600" dirty="0"/>
+              <a:t>Midrange routes show the lowest average departure delay, while short and very long routes are higher.</a:t>
+            </a:r>
+            <a:endParaRPr lang="en-US" dirty="0"/>
+          </a:p>
+        </p:txBody>
+      </p:sp>
+      <p:sp>
+        <p:nvSpPr>
+          <p:cNvPr id="6" name="TextBox 5">
+            <a:extLst>
+              <a:ext uri="{FF2B5EF4-FFF2-40B4-BE49-F238E27FC236}">
+                <a16:creationId xmlns:a16="http://schemas.microsoft.com/office/drawing/2014/main" id="{DBCC0E18-2454-F524-1B25-9B71F57AD34D}"/>
+              </a:ext>
+            </a:extLst>
+          </p:cNvPr>
+          <p:cNvSpPr txBox="1"/>
+          <p:nvPr/>
+        </p:nvSpPr>
+        <p:spPr>
+          <a:xfrm>
+            <a:off x="5217843" y="4667926"/>
+            <a:ext cx="2852452" cy="1384995"/>
+          </a:xfrm>
+          <a:prstGeom prst="rect">
+            <a:avLst/>
+          </a:prstGeom>
+          <a:noFill/>
+        </p:spPr>
+        <p:txBody>
+          <a:bodyPr wrap="square" rtlCol="0">
+            <a:spAutoFit/>
+          </a:bodyPr>
+          <a:lstStyle/>
+          <a:p>
+            <a:pPr algn="ctr"/>
+            <a:r>
+              <a:rPr lang="en-US" dirty="0"/>
+              <a:t>Satisfaction by class X travel type: </a:t>
+            </a:r>
+            <a:r>
+              <a:rPr lang="en-US" sz="1600" dirty="0"/>
+              <a:t>Premium Cabin + Business travel has the highest satisfaction; economy and leisure have the lowest. </a:t>
+            </a:r>
+            <a:endParaRPr lang="en-US" dirty="0"/>
+          </a:p>
+        </p:txBody>
+      </p:sp>
+      <p:sp>
+        <p:nvSpPr>
+          <p:cNvPr id="8" name="TextBox 7">
+            <a:extLst>
+              <a:ext uri="{FF2B5EF4-FFF2-40B4-BE49-F238E27FC236}">
+                <a16:creationId xmlns:a16="http://schemas.microsoft.com/office/drawing/2014/main" id="{53605270-D328-62A7-1E75-56C6912D3365}"/>
+              </a:ext>
+            </a:extLst>
+          </p:cNvPr>
+          <p:cNvSpPr txBox="1"/>
+          <p:nvPr/>
+        </p:nvSpPr>
+        <p:spPr>
+          <a:xfrm>
+            <a:off x="8487104" y="4773431"/>
+            <a:ext cx="2852452" cy="1107996"/>
+          </a:xfrm>
+          <a:prstGeom prst="rect">
+            <a:avLst/>
+          </a:prstGeom>
+          <a:noFill/>
+        </p:spPr>
+        <p:txBody>
+          <a:bodyPr wrap="square" rtlCol="0">
+            <a:spAutoFit/>
+          </a:bodyPr>
+          <a:lstStyle/>
+          <a:p>
+            <a:pPr algn="ctr"/>
+            <a:r>
+              <a:rPr lang="en-US" dirty="0"/>
+              <a:t>Customer type effect:</a:t>
+            </a:r>
+          </a:p>
+          <a:p>
+            <a:pPr algn="ctr"/>
+            <a:r>
+              <a:rPr lang="en-US" sz="1600" dirty="0"/>
+              <a:t>Returning customers rate service roughly 2 times higher than first time customers.</a:t>
+            </a:r>
+          </a:p>
+        </p:txBody>
+      </p:sp>
     </p:spTree>
     <p:extLst>
       <p:ext uri="{BB962C8B-B14F-4D97-AF65-F5344CB8AC3E}">
@@ -4713,7 +4960,7 @@
         </p:blipFill>
         <p:spPr>
           <a:xfrm>
-            <a:off x="838200" y="1690688"/>
+            <a:off x="659878" y="1582046"/>
             <a:ext cx="3074427" cy="2610126"/>
           </a:xfrm>
           <a:prstGeom prst="rect">
@@ -4743,7 +4990,7 @@
         </p:blipFill>
         <p:spPr>
           <a:xfrm>
-            <a:off x="4236915" y="2357439"/>
+            <a:off x="4324185" y="1582046"/>
             <a:ext cx="3543630" cy="2610126"/>
           </a:xfrm>
           <a:prstGeom prst="rect">
@@ -4773,7 +5020,7 @@
         </p:blipFill>
         <p:spPr>
           <a:xfrm>
-            <a:off x="8104833" y="3509963"/>
+            <a:off x="8516391" y="1582046"/>
             <a:ext cx="3427289" cy="2631775"/>
           </a:xfrm>
           <a:prstGeom prst="rect">
@@ -4781,6 +5028,129 @@
           </a:prstGeom>
         </p:spPr>
       </p:pic>
+      <p:sp>
+        <p:nvSpPr>
+          <p:cNvPr id="5" name="TextBox 4">
+            <a:extLst>
+              <a:ext uri="{FF2B5EF4-FFF2-40B4-BE49-F238E27FC236}">
+                <a16:creationId xmlns:a16="http://schemas.microsoft.com/office/drawing/2014/main" id="{4F2EED0D-1C9F-3D3C-8DE8-F72558C58BBF}"/>
+              </a:ext>
+            </a:extLst>
+          </p:cNvPr>
+          <p:cNvSpPr txBox="1"/>
+          <p:nvPr/>
+        </p:nvSpPr>
+        <p:spPr>
+          <a:xfrm>
+            <a:off x="770865" y="4423482"/>
+            <a:ext cx="2852452" cy="1384995"/>
+          </a:xfrm>
+          <a:prstGeom prst="rect">
+            <a:avLst/>
+          </a:prstGeom>
+          <a:noFill/>
+        </p:spPr>
+        <p:txBody>
+          <a:bodyPr wrap="square" rtlCol="0">
+            <a:spAutoFit/>
+          </a:bodyPr>
+          <a:lstStyle/>
+          <a:p>
+            <a:pPr algn="ctr"/>
+            <a:r>
+              <a:rPr lang="en-US" dirty="0"/>
+              <a:t>Satisfaction by class X travel type: </a:t>
+            </a:r>
+            <a:r>
+              <a:rPr lang="en-US" sz="1600" dirty="0"/>
+              <a:t>Premium Cabin + Business travel has the highest satisfaction; economy and leisure have the lowest. </a:t>
+            </a:r>
+            <a:endParaRPr lang="en-US" dirty="0"/>
+          </a:p>
+        </p:txBody>
+      </p:sp>
+      <p:sp>
+        <p:nvSpPr>
+          <p:cNvPr id="7" name="TextBox 6">
+            <a:extLst>
+              <a:ext uri="{FF2B5EF4-FFF2-40B4-BE49-F238E27FC236}">
+                <a16:creationId xmlns:a16="http://schemas.microsoft.com/office/drawing/2014/main" id="{18C7FCDE-4684-41D2-ABE7-68172585383E}"/>
+              </a:ext>
+            </a:extLst>
+          </p:cNvPr>
+          <p:cNvSpPr txBox="1"/>
+          <p:nvPr/>
+        </p:nvSpPr>
+        <p:spPr>
+          <a:xfrm>
+            <a:off x="4669774" y="4423482"/>
+            <a:ext cx="2852452" cy="1354217"/>
+          </a:xfrm>
+          <a:prstGeom prst="rect">
+            <a:avLst/>
+          </a:prstGeom>
+          <a:noFill/>
+        </p:spPr>
+        <p:txBody>
+          <a:bodyPr wrap="square" rtlCol="0">
+            <a:spAutoFit/>
+          </a:bodyPr>
+          <a:lstStyle/>
+          <a:p>
+            <a:pPr algn="ctr"/>
+            <a:r>
+              <a:rPr lang="en-US" dirty="0"/>
+              <a:t>Satisfaction by class : </a:t>
+            </a:r>
+            <a:r>
+              <a:rPr lang="en-US" sz="1600" dirty="0"/>
+              <a:t>Premium averages ~0.69 satisfaction, versus 0.25 for standard and 0.18 for basic, roughly a 3x gap.</a:t>
+            </a:r>
+            <a:endParaRPr lang="en-US" dirty="0"/>
+          </a:p>
+        </p:txBody>
+      </p:sp>
+      <p:sp>
+        <p:nvSpPr>
+          <p:cNvPr id="8" name="TextBox 7">
+            <a:extLst>
+              <a:ext uri="{FF2B5EF4-FFF2-40B4-BE49-F238E27FC236}">
+                <a16:creationId xmlns:a16="http://schemas.microsoft.com/office/drawing/2014/main" id="{CFD17F22-80F8-B43D-1553-66ACA70382BD}"/>
+              </a:ext>
+            </a:extLst>
+          </p:cNvPr>
+          <p:cNvSpPr txBox="1"/>
+          <p:nvPr/>
+        </p:nvSpPr>
+        <p:spPr>
+          <a:xfrm>
+            <a:off x="8803809" y="4423481"/>
+            <a:ext cx="2852452" cy="1631216"/>
+          </a:xfrm>
+          <a:prstGeom prst="rect">
+            <a:avLst/>
+          </a:prstGeom>
+          <a:noFill/>
+        </p:spPr>
+        <p:txBody>
+          <a:bodyPr wrap="square" rtlCol="0">
+            <a:spAutoFit/>
+          </a:bodyPr>
+          <a:lstStyle/>
+          <a:p>
+            <a:pPr algn="ctr"/>
+            <a:r>
+              <a:rPr lang="en-US" dirty="0"/>
+              <a:t>Avg Departure Delay by Flight Distance: </a:t>
+            </a:r>
+            <a:r>
+              <a:rPr lang="en-US" sz="1600" dirty="0"/>
+              <a:t>Delays hover roughly 13-16 minutes across most distances, indicating no simple linear trend with route length.</a:t>
+            </a:r>
+            <a:endParaRPr lang="en-US" dirty="0"/>
+          </a:p>
+        </p:txBody>
+      </p:sp>
     </p:spTree>
     <p:extLst>
       <p:ext uri="{BB962C8B-B14F-4D97-AF65-F5344CB8AC3E}">
@@ -4996,7 +5366,13 @@
   <p:cSld>
     <p:spTree>
       <p:nvGrpSpPr>
-        <p:cNvPr id="1" name=""/>
+        <p:cNvPr id="1" name="">
+          <a:extLst>
+            <a:ext uri="{FF2B5EF4-FFF2-40B4-BE49-F238E27FC236}">
+              <a16:creationId xmlns:a16="http://schemas.microsoft.com/office/drawing/2014/main" id="{57EB9B0A-9BBF-6A7B-90C6-F1FEF168FAF0}"/>
+            </a:ext>
+          </a:extLst>
+        </p:cNvPr>
         <p:cNvGrpSpPr/>
         <p:nvPr/>
       </p:nvGrpSpPr>
@@ -5013,7 +5389,7 @@
           <p:cNvPr id="2" name="Title 1">
             <a:extLst>
               <a:ext uri="{FF2B5EF4-FFF2-40B4-BE49-F238E27FC236}">
-                <a16:creationId xmlns:a16="http://schemas.microsoft.com/office/drawing/2014/main" id="{7998C1A2-E365-4EAD-A777-10EF9BD2588C}"/>
+                <a16:creationId xmlns:a16="http://schemas.microsoft.com/office/drawing/2014/main" id="{0ECB69F3-C576-E6B0-5F61-97586B0AB364}"/>
               </a:ext>
             </a:extLst>
           </p:cNvPr>
@@ -5041,7 +5417,7 @@
           <p:cNvPr id="3" name="Content Placeholder 2">
             <a:extLst>
               <a:ext uri="{FF2B5EF4-FFF2-40B4-BE49-F238E27FC236}">
-                <a16:creationId xmlns:a16="http://schemas.microsoft.com/office/drawing/2014/main" id="{83DC0D0A-FDCC-4561-A8EB-1F836A94AACC}"/>
+                <a16:creationId xmlns:a16="http://schemas.microsoft.com/office/drawing/2014/main" id="{9AC741DE-41F9-BB59-259A-27E59FA7D55D}"/>
               </a:ext>
             </a:extLst>
           </p:cNvPr>
@@ -5052,13 +5428,23 @@
             <p:ph idx="1"/>
           </p:nvPr>
         </p:nvSpPr>
-        <p:spPr/>
-        <p:txBody>
-          <a:bodyPr/>
-          <a:lstStyle/>
-          <a:p>
-            <a:r>
-              <a:rPr lang="en-US" sz="1800" dirty="0">
+        <p:spPr>
+          <a:xfrm>
+            <a:off x="838200" y="1554021"/>
+            <a:ext cx="10515600" cy="4351338"/>
+          </a:xfrm>
+        </p:spPr>
+        <p:txBody>
+          <a:bodyPr>
+            <a:normAutofit fontScale="92500" lnSpcReduction="20000"/>
+          </a:bodyPr>
+          <a:lstStyle/>
+          <a:p>
+            <a:pPr marL="0" indent="0" algn="ctr">
+              <a:buNone/>
+            </a:pPr>
+            <a:r>
+              <a:rPr lang="en-US" sz="2400" dirty="0">
                 <a:solidFill>
                   <a:srgbClr val="000000"/>
                 </a:solidFill>
@@ -5066,16 +5452,82 @@
                 <a:latin typeface="Times New Roman" panose="02020603050405020304" pitchFamily="18" charset="0"/>
                 <a:ea typeface="Times New Roman" panose="02020603050405020304" pitchFamily="18" charset="0"/>
               </a:rPr>
-              <a:t>&lt;apply results, connect results with the chosen problem statement or business question&gt;</a:t>
-            </a:r>
-            <a:endParaRPr lang="en-US" dirty="0"/>
+              <a:t>Deploy Ridge (</a:t>
+            </a:r>
+            <a:r>
+              <a:rPr lang="el-GR" sz="2400" dirty="0"/>
+              <a:t>α=3</a:t>
+            </a:r>
+            <a:r>
+              <a:rPr lang="en-US" sz="2400" dirty="0">
+                <a:solidFill>
+                  <a:srgbClr val="000000"/>
+                </a:solidFill>
+                <a:effectLst/>
+                <a:latin typeface="Times New Roman" panose="02020603050405020304" pitchFamily="18" charset="0"/>
+                <a:ea typeface="Times New Roman" panose="02020603050405020304" pitchFamily="18" charset="0"/>
+              </a:rPr>
+              <a:t>) to predict arrival delay and drive targeted actions. </a:t>
+            </a:r>
+          </a:p>
+          <a:p>
+            <a:r>
+              <a:rPr lang="en-US" dirty="0"/>
+              <a:t>Strategy:</a:t>
+            </a:r>
+          </a:p>
+          <a:p>
+            <a:pPr lvl="1"/>
+            <a:r>
+              <a:rPr lang="en-US" sz="2000" dirty="0"/>
+              <a:t>Use the Ridge model with scaling and one hot encoding to forecast arrival delay. At dispatch, flag flights whose predicted delay exceeds 11 minutes to trigger tighter turn checks on short haul legs and contingency on very long routes. For customers, send proactive updates and small amenities where satisfaction is most elastic.</a:t>
+            </a:r>
+          </a:p>
+          <a:p>
+            <a:r>
+              <a:rPr lang="en-US" sz="2400" dirty="0"/>
+              <a:t>Operations:</a:t>
+            </a:r>
+          </a:p>
+          <a:p>
+            <a:pPr lvl="1"/>
+            <a:r>
+              <a:rPr lang="en-US" sz="2000" dirty="0"/>
+              <a:t>Monitor predicted delays and auto trigger turn-time checks and crew/gate coordination on flagged flights. Use the model’s typical absolute error to set alert thresholds. </a:t>
+            </a:r>
+          </a:p>
+          <a:p>
+            <a:r>
+              <a:rPr lang="en-US" sz="2400" dirty="0"/>
+              <a:t>Customer Experience</a:t>
+            </a:r>
+          </a:p>
+          <a:p>
+            <a:pPr lvl="1"/>
+            <a:r>
+              <a:rPr lang="en-US" sz="2000" dirty="0"/>
+              <a:t>Prioritize proactive notifications, connection guidance, and small amenities on economy-leisure and first-time itineraries. Keep premium and business steady where satisfaction is already high.</a:t>
+            </a:r>
+          </a:p>
+          <a:p>
+            <a:r>
+              <a:rPr lang="en-US" sz="2400" dirty="0"/>
+              <a:t>Measure – Ship – Improve</a:t>
+            </a:r>
+          </a:p>
+          <a:p>
+            <a:pPr lvl="1"/>
+            <a:r>
+              <a:rPr lang="en-US" sz="2000" dirty="0"/>
+              <a:t>Track on time %, average arrival delay, rebook rate, and satisfaction by segment. Retrain monthly, log CV RMSE vs holdout to catch drift. Next: stabilize long-haul bins and add weather data.</a:t>
+            </a:r>
           </a:p>
         </p:txBody>
       </p:sp>
     </p:spTree>
     <p:extLst>
       <p:ext uri="{BB962C8B-B14F-4D97-AF65-F5344CB8AC3E}">
-        <p14:creationId xmlns:p14="http://schemas.microsoft.com/office/powerpoint/2010/main" val="4024108741"/>
+        <p14:creationId xmlns:p14="http://schemas.microsoft.com/office/powerpoint/2010/main" val="687968742"/>
       </p:ext>
     </p:extLst>
   </p:cSld>

--- a/VITALE_PPT.pptx
+++ b/VITALE_PPT.pptx
@@ -12,9 +12,9 @@
     <p:sldId id="260" r:id="rId6"/>
     <p:sldId id="261" r:id="rId7"/>
     <p:sldId id="264" r:id="rId8"/>
-    <p:sldId id="262" r:id="rId9"/>
-    <p:sldId id="265" r:id="rId10"/>
-    <p:sldId id="263" r:id="rId11"/>
+    <p:sldId id="263" r:id="rId9"/>
+    <p:sldId id="262" r:id="rId10"/>
+    <p:sldId id="265" r:id="rId11"/>
   </p:sldIdLst>
   <p:sldSz cx="12192000" cy="6858000"/>
   <p:notesSz cx="6858000" cy="9144000"/>
@@ -466,7 +466,7 @@
           <a:p>
             <a:fld id="{3F52AFC1-4F45-459D-BC95-0F8F5E3A4294}" type="datetimeFigureOut">
               <a:rPr lang="en-US" smtClean="0"/>
-              <a:t>10/20/2025</a:t>
+              <a:t>10/26/2025</a:t>
             </a:fld>
             <a:endParaRPr lang="en-US"/>
           </a:p>
@@ -664,7 +664,7 @@
           <a:p>
             <a:fld id="{3F52AFC1-4F45-459D-BC95-0F8F5E3A4294}" type="datetimeFigureOut">
               <a:rPr lang="en-US" smtClean="0"/>
-              <a:t>10/20/2025</a:t>
+              <a:t>10/26/2025</a:t>
             </a:fld>
             <a:endParaRPr lang="en-US"/>
           </a:p>
@@ -872,7 +872,7 @@
           <a:p>
             <a:fld id="{3F52AFC1-4F45-459D-BC95-0F8F5E3A4294}" type="datetimeFigureOut">
               <a:rPr lang="en-US" smtClean="0"/>
-              <a:t>10/20/2025</a:t>
+              <a:t>10/26/2025</a:t>
             </a:fld>
             <a:endParaRPr lang="en-US"/>
           </a:p>
@@ -1070,7 +1070,7 @@
           <a:p>
             <a:fld id="{3F52AFC1-4F45-459D-BC95-0F8F5E3A4294}" type="datetimeFigureOut">
               <a:rPr lang="en-US" smtClean="0"/>
-              <a:t>10/20/2025</a:t>
+              <a:t>10/26/2025</a:t>
             </a:fld>
             <a:endParaRPr lang="en-US"/>
           </a:p>
@@ -1345,7 +1345,7 @@
           <a:p>
             <a:fld id="{3F52AFC1-4F45-459D-BC95-0F8F5E3A4294}" type="datetimeFigureOut">
               <a:rPr lang="en-US" smtClean="0"/>
-              <a:t>10/20/2025</a:t>
+              <a:t>10/26/2025</a:t>
             </a:fld>
             <a:endParaRPr lang="en-US"/>
           </a:p>
@@ -1610,7 +1610,7 @@
           <a:p>
             <a:fld id="{3F52AFC1-4F45-459D-BC95-0F8F5E3A4294}" type="datetimeFigureOut">
               <a:rPr lang="en-US" smtClean="0"/>
-              <a:t>10/20/2025</a:t>
+              <a:t>10/26/2025</a:t>
             </a:fld>
             <a:endParaRPr lang="en-US"/>
           </a:p>
@@ -2022,7 +2022,7 @@
           <a:p>
             <a:fld id="{3F52AFC1-4F45-459D-BC95-0F8F5E3A4294}" type="datetimeFigureOut">
               <a:rPr lang="en-US" smtClean="0"/>
-              <a:t>10/20/2025</a:t>
+              <a:t>10/26/2025</a:t>
             </a:fld>
             <a:endParaRPr lang="en-US"/>
           </a:p>
@@ -2163,7 +2163,7 @@
           <a:p>
             <a:fld id="{3F52AFC1-4F45-459D-BC95-0F8F5E3A4294}" type="datetimeFigureOut">
               <a:rPr lang="en-US" smtClean="0"/>
-              <a:t>10/20/2025</a:t>
+              <a:t>10/26/2025</a:t>
             </a:fld>
             <a:endParaRPr lang="en-US"/>
           </a:p>
@@ -2276,7 +2276,7 @@
           <a:p>
             <a:fld id="{3F52AFC1-4F45-459D-BC95-0F8F5E3A4294}" type="datetimeFigureOut">
               <a:rPr lang="en-US" smtClean="0"/>
-              <a:t>10/20/2025</a:t>
+              <a:t>10/26/2025</a:t>
             </a:fld>
             <a:endParaRPr lang="en-US"/>
           </a:p>
@@ -2587,7 +2587,7 @@
           <a:p>
             <a:fld id="{3F52AFC1-4F45-459D-BC95-0F8F5E3A4294}" type="datetimeFigureOut">
               <a:rPr lang="en-US" smtClean="0"/>
-              <a:t>10/20/2025</a:t>
+              <a:t>10/26/2025</a:t>
             </a:fld>
             <a:endParaRPr lang="en-US"/>
           </a:p>
@@ -2875,7 +2875,7 @@
           <a:p>
             <a:fld id="{3F52AFC1-4F45-459D-BC95-0F8F5E3A4294}" type="datetimeFigureOut">
               <a:rPr lang="en-US" smtClean="0"/>
-              <a:t>10/20/2025</a:t>
+              <a:t>10/26/2025</a:t>
             </a:fld>
             <a:endParaRPr lang="en-US"/>
           </a:p>
@@ -3116,7 +3116,7 @@
           <a:p>
             <a:fld id="{3F52AFC1-4F45-459D-BC95-0F8F5E3A4294}" type="datetimeFigureOut">
               <a:rPr lang="en-US" smtClean="0"/>
-              <a:t>10/20/2025</a:t>
+              <a:t>10/26/2025</a:t>
             </a:fld>
             <a:endParaRPr lang="en-US"/>
           </a:p>
@@ -3641,7 +3641,13 @@
   <p:cSld>
     <p:spTree>
       <p:nvGrpSpPr>
-        <p:cNvPr id="1" name=""/>
+        <p:cNvPr id="1" name="">
+          <a:extLst>
+            <a:ext uri="{FF2B5EF4-FFF2-40B4-BE49-F238E27FC236}">
+              <a16:creationId xmlns:a16="http://schemas.microsoft.com/office/drawing/2014/main" id="{57EB9B0A-9BBF-6A7B-90C6-F1FEF168FAF0}"/>
+            </a:ext>
+          </a:extLst>
+        </p:cNvPr>
         <p:cNvGrpSpPr/>
         <p:nvPr/>
       </p:nvGrpSpPr>
@@ -3658,7 +3664,7 @@
           <p:cNvPr id="2" name="Title 1">
             <a:extLst>
               <a:ext uri="{FF2B5EF4-FFF2-40B4-BE49-F238E27FC236}">
-                <a16:creationId xmlns:a16="http://schemas.microsoft.com/office/drawing/2014/main" id="{7998C1A2-E365-4EAD-A777-10EF9BD2588C}"/>
+                <a16:creationId xmlns:a16="http://schemas.microsoft.com/office/drawing/2014/main" id="{0ECB69F3-C576-E6B0-5F61-97586B0AB364}"/>
               </a:ext>
             </a:extLst>
           </p:cNvPr>
@@ -3686,7 +3692,7 @@
           <p:cNvPr id="3" name="Content Placeholder 2">
             <a:extLst>
               <a:ext uri="{FF2B5EF4-FFF2-40B4-BE49-F238E27FC236}">
-                <a16:creationId xmlns:a16="http://schemas.microsoft.com/office/drawing/2014/main" id="{83DC0D0A-FDCC-4561-A8EB-1F836A94AACC}"/>
+                <a16:creationId xmlns:a16="http://schemas.microsoft.com/office/drawing/2014/main" id="{9AC741DE-41F9-BB59-259A-27E59FA7D55D}"/>
               </a:ext>
             </a:extLst>
           </p:cNvPr>
@@ -3697,13 +3703,23 @@
             <p:ph idx="1"/>
           </p:nvPr>
         </p:nvSpPr>
-        <p:spPr/>
-        <p:txBody>
-          <a:bodyPr/>
-          <a:lstStyle/>
-          <a:p>
-            <a:r>
-              <a:rPr lang="en-US" sz="1800" dirty="0">
+        <p:spPr>
+          <a:xfrm>
+            <a:off x="838200" y="1554021"/>
+            <a:ext cx="10515600" cy="4351338"/>
+          </a:xfrm>
+        </p:spPr>
+        <p:txBody>
+          <a:bodyPr>
+            <a:normAutofit fontScale="92500" lnSpcReduction="20000"/>
+          </a:bodyPr>
+          <a:lstStyle/>
+          <a:p>
+            <a:pPr marL="0" indent="0" algn="ctr">
+              <a:buNone/>
+            </a:pPr>
+            <a:r>
+              <a:rPr lang="en-US" sz="2400" dirty="0">
                 <a:solidFill>
                   <a:srgbClr val="000000"/>
                 </a:solidFill>
@@ -3711,16 +3727,82 @@
                 <a:latin typeface="Times New Roman" panose="02020603050405020304" pitchFamily="18" charset="0"/>
                 <a:ea typeface="Times New Roman" panose="02020603050405020304" pitchFamily="18" charset="0"/>
               </a:rPr>
-              <a:t>&lt;apply results, connect results with the chosen problem statement or business question&gt;</a:t>
-            </a:r>
-            <a:endParaRPr lang="en-US" dirty="0"/>
+              <a:t>Deploy Ridge (</a:t>
+            </a:r>
+            <a:r>
+              <a:rPr lang="el-GR" sz="2400" dirty="0"/>
+              <a:t>α=3</a:t>
+            </a:r>
+            <a:r>
+              <a:rPr lang="en-US" sz="2400" dirty="0">
+                <a:solidFill>
+                  <a:srgbClr val="000000"/>
+                </a:solidFill>
+                <a:effectLst/>
+                <a:latin typeface="Times New Roman" panose="02020603050405020304" pitchFamily="18" charset="0"/>
+                <a:ea typeface="Times New Roman" panose="02020603050405020304" pitchFamily="18" charset="0"/>
+              </a:rPr>
+              <a:t>) to predict arrival delay and drive targeted actions. </a:t>
+            </a:r>
+          </a:p>
+          <a:p>
+            <a:r>
+              <a:rPr lang="en-US" dirty="0"/>
+              <a:t>Strategy:</a:t>
+            </a:r>
+          </a:p>
+          <a:p>
+            <a:pPr lvl="1"/>
+            <a:r>
+              <a:rPr lang="en-US" sz="2000" dirty="0"/>
+              <a:t>Use the Ridge model with scaling and one hot encoding to forecast arrival delay. At dispatch, flag flights whose predicted delay exceeds 11 minutes to trigger tighter turn checks on short haul legs and contingency on very long routes. For customers, send proactive updates and small amenities where satisfaction is most elastic.</a:t>
+            </a:r>
+          </a:p>
+          <a:p>
+            <a:r>
+              <a:rPr lang="en-US" sz="2400" dirty="0"/>
+              <a:t>Operations:</a:t>
+            </a:r>
+          </a:p>
+          <a:p>
+            <a:pPr lvl="1"/>
+            <a:r>
+              <a:rPr lang="en-US" sz="2000" dirty="0"/>
+              <a:t>Monitor predicted delays and auto trigger turn-time checks and crew/gate coordination on flagged flights. Use the model’s typical absolute error to set alert thresholds. </a:t>
+            </a:r>
+          </a:p>
+          <a:p>
+            <a:r>
+              <a:rPr lang="en-US" sz="2400" dirty="0"/>
+              <a:t>Customer Experience</a:t>
+            </a:r>
+          </a:p>
+          <a:p>
+            <a:pPr lvl="1"/>
+            <a:r>
+              <a:rPr lang="en-US" sz="2000" dirty="0"/>
+              <a:t>Prioritize proactive notifications, connection guidance, and small amenities on economy-leisure and first-time itineraries. Keep premium and business steady where satisfaction is already high.</a:t>
+            </a:r>
+          </a:p>
+          <a:p>
+            <a:r>
+              <a:rPr lang="en-US" sz="2400" dirty="0"/>
+              <a:t>Measure – Ship – Improve</a:t>
+            </a:r>
+          </a:p>
+          <a:p>
+            <a:pPr lvl="1"/>
+            <a:r>
+              <a:rPr lang="en-US" sz="2000" dirty="0"/>
+              <a:t>Track on time %, average arrival delay, rebook rate, and satisfaction by segment. Retrain monthly, log CV RMSE vs holdout to catch drift. Next: stabilize long-haul bins and add weather data.</a:t>
+            </a:r>
           </a:p>
         </p:txBody>
       </p:sp>
     </p:spTree>
     <p:extLst>
       <p:ext uri="{BB962C8B-B14F-4D97-AF65-F5344CB8AC3E}">
-        <p14:creationId xmlns:p14="http://schemas.microsoft.com/office/powerpoint/2010/main" val="4024108741"/>
+        <p14:creationId xmlns:p14="http://schemas.microsoft.com/office/powerpoint/2010/main" val="687968742"/>
       </p:ext>
     </p:extLst>
   </p:cSld>
@@ -4616,7 +4698,7 @@
           <a:p>
             <a:r>
               <a:rPr lang="en-US" dirty="0"/>
-              <a:t>Analyze data</a:t>
+              <a:t>Data Patterns</a:t>
             </a:r>
           </a:p>
         </p:txBody>
@@ -4931,8 +5013,13 @@
           <a:p>
             <a:r>
               <a:rPr lang="en-US" dirty="0"/>
-              <a:t>Analyze data</a:t>
-            </a:r>
+              <a:t>Data </a:t>
+            </a:r>
+            <a:r>
+              <a:rPr lang="en-US" dirty="0" err="1"/>
+              <a:t>Paterns</a:t>
+            </a:r>
+            <a:endParaRPr lang="en-US" dirty="0"/>
           </a:p>
         </p:txBody>
       </p:sp>
@@ -5186,7 +5273,7 @@
           <p:cNvPr id="2" name="Title 1">
             <a:extLst>
               <a:ext uri="{FF2B5EF4-FFF2-40B4-BE49-F238E27FC236}">
-                <a16:creationId xmlns:a16="http://schemas.microsoft.com/office/drawing/2014/main" id="{DB2A7252-6823-44F9-B464-D7A15D12BB65}"/>
+                <a16:creationId xmlns:a16="http://schemas.microsoft.com/office/drawing/2014/main" id="{7998C1A2-E365-4EAD-A777-10EF9BD2588C}"/>
               </a:ext>
             </a:extLst>
           </p:cNvPr>
@@ -5204,7 +5291,7 @@
           <a:p>
             <a:r>
               <a:rPr lang="en-US" dirty="0"/>
-              <a:t>Report</a:t>
+              <a:t>Results – Model Performance</a:t>
             </a:r>
           </a:p>
         </p:txBody>
@@ -5214,7 +5301,7 @@
           <p:cNvPr id="3" name="Content Placeholder 2">
             <a:extLst>
               <a:ext uri="{FF2B5EF4-FFF2-40B4-BE49-F238E27FC236}">
-                <a16:creationId xmlns:a16="http://schemas.microsoft.com/office/drawing/2014/main" id="{7FEAE391-6366-4E20-A14E-0ECFAEA8029A}"/>
+                <a16:creationId xmlns:a16="http://schemas.microsoft.com/office/drawing/2014/main" id="{83DC0D0A-FDCC-4561-A8EB-1F836A94AACC}"/>
               </a:ext>
             </a:extLst>
           </p:cNvPr>
@@ -5235,123 +5322,191 @@
                 <a:solidFill>
                   <a:srgbClr val="000000"/>
                 </a:solidFill>
+                <a:effectLst/>
                 <a:latin typeface="Times New Roman" panose="02020603050405020304" pitchFamily="18" charset="0"/>
+                <a:ea typeface="Times New Roman" panose="02020603050405020304" pitchFamily="18" charset="0"/>
               </a:rPr>
-              <a:t>Analysis shows that service tier and traveler type are strongly associated with higher satisfaction, and departure delays vary systematically by route length. </a:t>
-            </a:r>
-          </a:p>
-          <a:p>
+              <a:t>The </a:t>
+            </a:r>
+            <a:r>
+              <a:rPr lang="en-US" sz="1800" dirty="0" err="1">
+                <a:solidFill>
+                  <a:srgbClr val="000000"/>
+                </a:solidFill>
+                <a:effectLst/>
+                <a:latin typeface="Times New Roman" panose="02020603050405020304" pitchFamily="18" charset="0"/>
+                <a:ea typeface="Times New Roman" panose="02020603050405020304" pitchFamily="18" charset="0"/>
+              </a:rPr>
+              <a:t>MLPRegressor</a:t>
+            </a:r>
             <a:r>
               <a:rPr lang="en-US" sz="1800" dirty="0">
                 <a:solidFill>
                   <a:srgbClr val="000000"/>
                 </a:solidFill>
+                <a:effectLst/>
                 <a:latin typeface="Times New Roman" panose="02020603050405020304" pitchFamily="18" charset="0"/>
+                <a:ea typeface="Times New Roman" panose="02020603050405020304" pitchFamily="18" charset="0"/>
               </a:rPr>
-              <a:t>Key Findings:</a:t>
-            </a:r>
-          </a:p>
-          <a:p>
-            <a:pPr lvl="1"/>
-            <a:r>
-              <a:rPr lang="en-US" sz="1800" dirty="0">
-                <a:solidFill>
-                  <a:srgbClr val="000000"/>
-                </a:solidFill>
-                <a:latin typeface="Times New Roman" panose="02020603050405020304" pitchFamily="18" charset="0"/>
-              </a:rPr>
-              <a:t>Business class and Loyal customers report the highest average satisfaction; effects are strongest for Business class on Business travel.</a:t>
-            </a:r>
-          </a:p>
-          <a:p>
-            <a:pPr lvl="1"/>
-            <a:r>
-              <a:rPr lang="en-US" sz="1800" dirty="0">
-                <a:solidFill>
-                  <a:srgbClr val="000000"/>
-                </a:solidFill>
-                <a:latin typeface="Times New Roman" panose="02020603050405020304" pitchFamily="18" charset="0"/>
-              </a:rPr>
-              <a:t>Departure delays differs across flight-distance bins, with a mid-range bump visible in the line plot.</a:t>
-            </a:r>
-          </a:p>
-          <a:p>
-            <a:r>
-              <a:rPr lang="en-US" sz="2000" dirty="0">
-                <a:solidFill>
-                  <a:srgbClr val="000000"/>
-                </a:solidFill>
-                <a:latin typeface="Times New Roman" panose="02020603050405020304" pitchFamily="18" charset="0"/>
-              </a:rPr>
-              <a:t>Suggestions:</a:t>
-            </a:r>
-          </a:p>
-          <a:p>
-            <a:pPr lvl="1"/>
-            <a:r>
-              <a:rPr lang="en-US" sz="1800" dirty="0">
-                <a:solidFill>
-                  <a:srgbClr val="000000"/>
-                </a:solidFill>
-                <a:latin typeface="Times New Roman" panose="02020603050405020304" pitchFamily="18" charset="0"/>
-              </a:rPr>
-              <a:t>Align service amenities to trip purpose(business travelers in premium cabins yield the best satisfaction signal).</a:t>
-            </a:r>
-          </a:p>
-          <a:p>
-            <a:pPr lvl="1"/>
-            <a:r>
-              <a:rPr lang="en-US" sz="1800" dirty="0">
-                <a:solidFill>
-                  <a:srgbClr val="000000"/>
-                </a:solidFill>
-                <a:latin typeface="Times New Roman" panose="02020603050405020304" pitchFamily="18" charset="0"/>
-              </a:rPr>
-              <a:t>Target operational improvements on mid-distance routes where delays cluster. </a:t>
-            </a:r>
-          </a:p>
-          <a:p>
-            <a:r>
-              <a:rPr lang="en-US" sz="2000" dirty="0">
-                <a:solidFill>
-                  <a:srgbClr val="000000"/>
-                </a:solidFill>
-                <a:latin typeface="Times New Roman" panose="02020603050405020304" pitchFamily="18" charset="0"/>
-              </a:rPr>
-              <a:t>Limitations:</a:t>
-            </a:r>
-          </a:p>
-          <a:p>
-            <a:pPr lvl="1"/>
-            <a:r>
-              <a:rPr lang="en-US" sz="1800" dirty="0">
-                <a:solidFill>
-                  <a:srgbClr val="000000"/>
-                </a:solidFill>
-                <a:latin typeface="Times New Roman" panose="02020603050405020304" pitchFamily="18" charset="0"/>
-              </a:rPr>
-              <a:t>Single table with no date/airport fields; no weather data. </a:t>
-            </a:r>
-          </a:p>
-          <a:p>
-            <a:pPr lvl="1"/>
-            <a:r>
-              <a:rPr lang="en-US" sz="1800" dirty="0">
-                <a:solidFill>
-                  <a:srgbClr val="000000"/>
-                </a:solidFill>
-                <a:latin typeface="Times New Roman" panose="02020603050405020304" pitchFamily="18" charset="0"/>
-              </a:rPr>
-              <a:t>Observational survey data; associations, not causation.</a:t>
-            </a:r>
-            <a:endParaRPr lang="en-US" sz="1800" dirty="0"/>
+              <a:t> achieved the lowest RMSE and highest R Squared, indicating slightly better fit than Ridge and Linear. SVR underperformed on this feature space. Given interpretability needs, Ridge remains a strong, nearly equivalent alternative</a:t>
+            </a:r>
+            <a:endParaRPr lang="en-US" dirty="0"/>
+          </a:p>
+        </p:txBody>
+      </p:sp>
+      <p:pic>
+        <p:nvPicPr>
+          <p:cNvPr id="5" name="Picture 4">
+            <a:extLst>
+              <a:ext uri="{FF2B5EF4-FFF2-40B4-BE49-F238E27FC236}">
+                <a16:creationId xmlns:a16="http://schemas.microsoft.com/office/drawing/2014/main" id="{5F44BD18-8D22-EEF5-2CBE-767073666671}"/>
+              </a:ext>
+            </a:extLst>
+          </p:cNvPr>
+          <p:cNvPicPr>
+            <a:picLocks noChangeAspect="1"/>
+          </p:cNvPicPr>
+          <p:nvPr/>
+        </p:nvPicPr>
+        <p:blipFill>
+          <a:blip r:embed="rId2"/>
+          <a:stretch>
+            <a:fillRect/>
+          </a:stretch>
+        </p:blipFill>
+        <p:spPr>
+          <a:xfrm>
+            <a:off x="1195732" y="2873366"/>
+            <a:ext cx="4574614" cy="1390816"/>
+          </a:xfrm>
+          <a:prstGeom prst="rect">
+            <a:avLst/>
+          </a:prstGeom>
+        </p:spPr>
+      </p:pic>
+      <p:pic>
+        <p:nvPicPr>
+          <p:cNvPr id="7" name="Picture 6">
+            <a:extLst>
+              <a:ext uri="{FF2B5EF4-FFF2-40B4-BE49-F238E27FC236}">
+                <a16:creationId xmlns:a16="http://schemas.microsoft.com/office/drawing/2014/main" id="{3449A5C5-8F4B-DD75-5967-B365C5C32D58}"/>
+              </a:ext>
+            </a:extLst>
+          </p:cNvPr>
+          <p:cNvPicPr>
+            <a:picLocks noChangeAspect="1"/>
+          </p:cNvPicPr>
+          <p:nvPr/>
+        </p:nvPicPr>
+        <p:blipFill>
+          <a:blip r:embed="rId3"/>
+          <a:stretch>
+            <a:fillRect/>
+          </a:stretch>
+        </p:blipFill>
+        <p:spPr>
+          <a:xfrm>
+            <a:off x="8891210" y="4504384"/>
+            <a:ext cx="2700715" cy="1988491"/>
+          </a:xfrm>
+          <a:prstGeom prst="rect">
+            <a:avLst/>
+          </a:prstGeom>
+        </p:spPr>
+      </p:pic>
+      <p:pic>
+        <p:nvPicPr>
+          <p:cNvPr id="9" name="Picture 8">
+            <a:extLst>
+              <a:ext uri="{FF2B5EF4-FFF2-40B4-BE49-F238E27FC236}">
+                <a16:creationId xmlns:a16="http://schemas.microsoft.com/office/drawing/2014/main" id="{4C796837-A975-AFDC-7459-C0148DF7D4F0}"/>
+              </a:ext>
+            </a:extLst>
+          </p:cNvPr>
+          <p:cNvPicPr>
+            <a:picLocks noChangeAspect="1"/>
+          </p:cNvPicPr>
+          <p:nvPr/>
+        </p:nvPicPr>
+        <p:blipFill>
+          <a:blip r:embed="rId4"/>
+          <a:stretch>
+            <a:fillRect/>
+          </a:stretch>
+        </p:blipFill>
+        <p:spPr>
+          <a:xfrm>
+            <a:off x="8891210" y="2459695"/>
+            <a:ext cx="2700715" cy="1938608"/>
+          </a:xfrm>
+          <a:prstGeom prst="rect">
+            <a:avLst/>
+          </a:prstGeom>
+        </p:spPr>
+      </p:pic>
+      <p:sp>
+        <p:nvSpPr>
+          <p:cNvPr id="10" name="TextBox 9">
+            <a:extLst>
+              <a:ext uri="{FF2B5EF4-FFF2-40B4-BE49-F238E27FC236}">
+                <a16:creationId xmlns:a16="http://schemas.microsoft.com/office/drawing/2014/main" id="{1B920399-C245-B55C-2CBF-6E916D35C071}"/>
+              </a:ext>
+            </a:extLst>
+          </p:cNvPr>
+          <p:cNvSpPr txBox="1"/>
+          <p:nvPr/>
+        </p:nvSpPr>
+        <p:spPr>
+          <a:xfrm>
+            <a:off x="1371601" y="4953000"/>
+            <a:ext cx="7448550" cy="1077218"/>
+          </a:xfrm>
+          <a:prstGeom prst="rect">
+            <a:avLst/>
+          </a:prstGeom>
+          <a:noFill/>
+        </p:spPr>
+        <p:txBody>
+          <a:bodyPr wrap="square" rtlCol="0">
+            <a:spAutoFit/>
+          </a:bodyPr>
+          <a:lstStyle/>
+          <a:p>
+            <a:pPr marL="285750" indent="-285750">
+              <a:buFont typeface="Arial" panose="020B0604020202020204" pitchFamily="34" charset="0"/>
+              <a:buChar char="•"/>
+            </a:pPr>
+            <a:r>
+              <a:rPr lang="en-US" sz="1600" dirty="0"/>
+              <a:t>Why I didn’t pick SVR:</a:t>
+            </a:r>
+          </a:p>
+          <a:p>
+            <a:pPr marL="742950" lvl="1" indent="-285750">
+              <a:buFont typeface="Arial" panose="020B0604020202020204" pitchFamily="34" charset="0"/>
+              <a:buChar char="•"/>
+            </a:pPr>
+            <a:r>
+              <a:rPr lang="en-US" sz="1600" dirty="0"/>
+              <a:t>Predicted vs Actual: Points bunch below the 45 degree line and saturated. </a:t>
+            </a:r>
+          </a:p>
+          <a:p>
+            <a:pPr marL="742950" lvl="1" indent="-285750">
+              <a:buFont typeface="Arial" panose="020B0604020202020204" pitchFamily="34" charset="0"/>
+              <a:buChar char="•"/>
+            </a:pPr>
+            <a:r>
+              <a:rPr lang="en-US" sz="1600" dirty="0"/>
+              <a:t>Residuals vs Fitted: Cone/Megaphone shape and several huge positives, large outliers the model can't capture. </a:t>
+            </a:r>
           </a:p>
         </p:txBody>
       </p:sp>
     </p:spTree>
     <p:extLst>
       <p:ext uri="{BB962C8B-B14F-4D97-AF65-F5344CB8AC3E}">
-        <p14:creationId xmlns:p14="http://schemas.microsoft.com/office/powerpoint/2010/main" val="2309908418"/>
+        <p14:creationId xmlns:p14="http://schemas.microsoft.com/office/powerpoint/2010/main" val="4024108741"/>
       </p:ext>
     </p:extLst>
   </p:cSld>
@@ -5366,13 +5521,7 @@
   <p:cSld>
     <p:spTree>
       <p:nvGrpSpPr>
-        <p:cNvPr id="1" name="">
-          <a:extLst>
-            <a:ext uri="{FF2B5EF4-FFF2-40B4-BE49-F238E27FC236}">
-              <a16:creationId xmlns:a16="http://schemas.microsoft.com/office/drawing/2014/main" id="{57EB9B0A-9BBF-6A7B-90C6-F1FEF168FAF0}"/>
-            </a:ext>
-          </a:extLst>
-        </p:cNvPr>
+        <p:cNvPr id="1" name=""/>
         <p:cNvGrpSpPr/>
         <p:nvPr/>
       </p:nvGrpSpPr>
@@ -5389,7 +5538,7 @@
           <p:cNvPr id="2" name="Title 1">
             <a:extLst>
               <a:ext uri="{FF2B5EF4-FFF2-40B4-BE49-F238E27FC236}">
-                <a16:creationId xmlns:a16="http://schemas.microsoft.com/office/drawing/2014/main" id="{0ECB69F3-C576-E6B0-5F61-97586B0AB364}"/>
+                <a16:creationId xmlns:a16="http://schemas.microsoft.com/office/drawing/2014/main" id="{DB2A7252-6823-44F9-B464-D7A15D12BB65}"/>
               </a:ext>
             </a:extLst>
           </p:cNvPr>
@@ -5402,12 +5551,14 @@
         </p:nvSpPr>
         <p:spPr/>
         <p:txBody>
-          <a:bodyPr/>
+          <a:bodyPr>
+            <a:normAutofit/>
+          </a:bodyPr>
           <a:lstStyle/>
           <a:p>
             <a:r>
               <a:rPr lang="en-US" dirty="0"/>
-              <a:t>Act</a:t>
+              <a:t>Summary</a:t>
             </a:r>
           </a:p>
         </p:txBody>
@@ -5417,7 +5568,7 @@
           <p:cNvPr id="3" name="Content Placeholder 2">
             <a:extLst>
               <a:ext uri="{FF2B5EF4-FFF2-40B4-BE49-F238E27FC236}">
-                <a16:creationId xmlns:a16="http://schemas.microsoft.com/office/drawing/2014/main" id="{9AC741DE-41F9-BB59-259A-27E59FA7D55D}"/>
+                <a16:creationId xmlns:a16="http://schemas.microsoft.com/office/drawing/2014/main" id="{7FEAE391-6366-4E20-A14E-0ECFAEA8029A}"/>
               </a:ext>
             </a:extLst>
           </p:cNvPr>
@@ -5428,106 +5579,133 @@
             <p:ph idx="1"/>
           </p:nvPr>
         </p:nvSpPr>
-        <p:spPr>
-          <a:xfrm>
-            <a:off x="838200" y="1554021"/>
-            <a:ext cx="10515600" cy="4351338"/>
-          </a:xfrm>
-        </p:spPr>
-        <p:txBody>
-          <a:bodyPr>
-            <a:normAutofit fontScale="92500" lnSpcReduction="20000"/>
-          </a:bodyPr>
-          <a:lstStyle/>
-          <a:p>
-            <a:pPr marL="0" indent="0" algn="ctr">
-              <a:buNone/>
-            </a:pPr>
-            <a:r>
-              <a:rPr lang="en-US" sz="2400" dirty="0">
+        <p:spPr/>
+        <p:txBody>
+          <a:bodyPr/>
+          <a:lstStyle/>
+          <a:p>
+            <a:r>
+              <a:rPr lang="en-US" sz="1800" dirty="0">
                 <a:solidFill>
                   <a:srgbClr val="000000"/>
                 </a:solidFill>
-                <a:effectLst/>
                 <a:latin typeface="Times New Roman" panose="02020603050405020304" pitchFamily="18" charset="0"/>
-                <a:ea typeface="Times New Roman" panose="02020603050405020304" pitchFamily="18" charset="0"/>
               </a:rPr>
-              <a:t>Deploy Ridge (</a:t>
-            </a:r>
-            <a:r>
-              <a:rPr lang="el-GR" sz="2400" dirty="0"/>
-              <a:t>α=3</a:t>
-            </a:r>
-            <a:r>
-              <a:rPr lang="en-US" sz="2400" dirty="0">
+              <a:t>Analysis shows that service tier and traveler type are strongly associated with higher satisfaction, and departure delays vary systematically by route length. </a:t>
+            </a:r>
+          </a:p>
+          <a:p>
+            <a:r>
+              <a:rPr lang="en-US" sz="1800" dirty="0">
                 <a:solidFill>
                   <a:srgbClr val="000000"/>
                 </a:solidFill>
-                <a:effectLst/>
                 <a:latin typeface="Times New Roman" panose="02020603050405020304" pitchFamily="18" charset="0"/>
-                <a:ea typeface="Times New Roman" panose="02020603050405020304" pitchFamily="18" charset="0"/>
               </a:rPr>
-              <a:t>) to predict arrival delay and drive targeted actions. </a:t>
-            </a:r>
-          </a:p>
-          <a:p>
-            <a:r>
-              <a:rPr lang="en-US" dirty="0"/>
-              <a:t>Strategy:</a:t>
+              <a:t>Key Findings:</a:t>
             </a:r>
           </a:p>
           <a:p>
             <a:pPr lvl="1"/>
             <a:r>
-              <a:rPr lang="en-US" sz="2000" dirty="0"/>
-              <a:t>Use the Ridge model with scaling and one hot encoding to forecast arrival delay. At dispatch, flag flights whose predicted delay exceeds 11 minutes to trigger tighter turn checks on short haul legs and contingency on very long routes. For customers, send proactive updates and small amenities where satisfaction is most elastic.</a:t>
-            </a:r>
-          </a:p>
-          <a:p>
-            <a:r>
-              <a:rPr lang="en-US" sz="2400" dirty="0"/>
-              <a:t>Operations:</a:t>
+              <a:rPr lang="en-US" sz="1800" dirty="0">
+                <a:solidFill>
+                  <a:srgbClr val="000000"/>
+                </a:solidFill>
+                <a:latin typeface="Times New Roman" panose="02020603050405020304" pitchFamily="18" charset="0"/>
+              </a:rPr>
+              <a:t>Business class and Loyal customers report the highest average satisfaction; effects are strongest for Business class on Business travel.</a:t>
             </a:r>
           </a:p>
           <a:p>
             <a:pPr lvl="1"/>
             <a:r>
-              <a:rPr lang="en-US" sz="2000" dirty="0"/>
-              <a:t>Monitor predicted delays and auto trigger turn-time checks and crew/gate coordination on flagged flights. Use the model’s typical absolute error to set alert thresholds. </a:t>
-            </a:r>
-          </a:p>
-          <a:p>
-            <a:r>
-              <a:rPr lang="en-US" sz="2400" dirty="0"/>
-              <a:t>Customer Experience</a:t>
+              <a:rPr lang="en-US" sz="1800" dirty="0">
+                <a:solidFill>
+                  <a:srgbClr val="000000"/>
+                </a:solidFill>
+                <a:latin typeface="Times New Roman" panose="02020603050405020304" pitchFamily="18" charset="0"/>
+              </a:rPr>
+              <a:t>Departure delays differs across flight-distance bins, with a mid-range bump visible in the line plot.</a:t>
+            </a:r>
+          </a:p>
+          <a:p>
+            <a:r>
+              <a:rPr lang="en-US" sz="2000" dirty="0">
+                <a:solidFill>
+                  <a:srgbClr val="000000"/>
+                </a:solidFill>
+                <a:latin typeface="Times New Roman" panose="02020603050405020304" pitchFamily="18" charset="0"/>
+              </a:rPr>
+              <a:t>Suggestions:</a:t>
             </a:r>
           </a:p>
           <a:p>
             <a:pPr lvl="1"/>
             <a:r>
-              <a:rPr lang="en-US" sz="2000" dirty="0"/>
-              <a:t>Prioritize proactive notifications, connection guidance, and small amenities on economy-leisure and first-time itineraries. Keep premium and business steady where satisfaction is already high.</a:t>
-            </a:r>
-          </a:p>
-          <a:p>
-            <a:r>
-              <a:rPr lang="en-US" sz="2400" dirty="0"/>
-              <a:t>Measure – Ship – Improve</a:t>
+              <a:rPr lang="en-US" sz="1800" dirty="0">
+                <a:solidFill>
+                  <a:srgbClr val="000000"/>
+                </a:solidFill>
+                <a:latin typeface="Times New Roman" panose="02020603050405020304" pitchFamily="18" charset="0"/>
+              </a:rPr>
+              <a:t>Align service amenities to trip purpose(business travelers in premium cabins yield the best satisfaction signal).</a:t>
             </a:r>
           </a:p>
           <a:p>
             <a:pPr lvl="1"/>
             <a:r>
-              <a:rPr lang="en-US" sz="2000" dirty="0"/>
-              <a:t>Track on time %, average arrival delay, rebook rate, and satisfaction by segment. Retrain monthly, log CV RMSE vs holdout to catch drift. Next: stabilize long-haul bins and add weather data.</a:t>
-            </a:r>
+              <a:rPr lang="en-US" sz="1800" dirty="0">
+                <a:solidFill>
+                  <a:srgbClr val="000000"/>
+                </a:solidFill>
+                <a:latin typeface="Times New Roman" panose="02020603050405020304" pitchFamily="18" charset="0"/>
+              </a:rPr>
+              <a:t>Target operational improvements on mid-distance routes where delays cluster. </a:t>
+            </a:r>
+          </a:p>
+          <a:p>
+            <a:r>
+              <a:rPr lang="en-US" sz="2000" dirty="0">
+                <a:solidFill>
+                  <a:srgbClr val="000000"/>
+                </a:solidFill>
+                <a:latin typeface="Times New Roman" panose="02020603050405020304" pitchFamily="18" charset="0"/>
+              </a:rPr>
+              <a:t>Limitations:</a:t>
+            </a:r>
+          </a:p>
+          <a:p>
+            <a:pPr lvl="1"/>
+            <a:r>
+              <a:rPr lang="en-US" sz="1800" dirty="0">
+                <a:solidFill>
+                  <a:srgbClr val="000000"/>
+                </a:solidFill>
+                <a:latin typeface="Times New Roman" panose="02020603050405020304" pitchFamily="18" charset="0"/>
+              </a:rPr>
+              <a:t>Single table with no date/airport fields; no weather data. </a:t>
+            </a:r>
+          </a:p>
+          <a:p>
+            <a:pPr lvl="1"/>
+            <a:r>
+              <a:rPr lang="en-US" sz="1800" dirty="0">
+                <a:solidFill>
+                  <a:srgbClr val="000000"/>
+                </a:solidFill>
+                <a:latin typeface="Times New Roman" panose="02020603050405020304" pitchFamily="18" charset="0"/>
+              </a:rPr>
+              <a:t>Observational survey data; associations, not causation.</a:t>
+            </a:r>
+            <a:endParaRPr lang="en-US" sz="1800" dirty="0"/>
           </a:p>
         </p:txBody>
       </p:sp>
     </p:spTree>
     <p:extLst>
       <p:ext uri="{BB962C8B-B14F-4D97-AF65-F5344CB8AC3E}">
-        <p14:creationId xmlns:p14="http://schemas.microsoft.com/office/powerpoint/2010/main" val="687968742"/>
+        <p14:creationId xmlns:p14="http://schemas.microsoft.com/office/powerpoint/2010/main" val="2309908418"/>
       </p:ext>
     </p:extLst>
   </p:cSld>
